--- a/00 PRESENTACIONES compartida alumnos/ED02b - Diagramas de comportamiento SEA.pptx
+++ b/00 PRESENTACIONES compartida alumnos/ED02b - Diagramas de comportamiento SEA.pptx
@@ -5,10 +5,10 @@
     <p:sldMasterId id="2147483687" r:id="rId1"/>
   </p:sldMasterIdLst>
   <p:notesMasterIdLst>
-    <p:notesMasterId r:id="rId24"/>
+    <p:notesMasterId r:id="rId25"/>
   </p:notesMasterIdLst>
   <p:handoutMasterIdLst>
-    <p:handoutMasterId r:id="rId25"/>
+    <p:handoutMasterId r:id="rId26"/>
   </p:handoutMasterIdLst>
   <p:sldIdLst>
     <p:sldId id="256" r:id="rId2"/>
@@ -33,39 +33,40 @@
     <p:sldId id="355" r:id="rId21"/>
     <p:sldId id="302" r:id="rId22"/>
     <p:sldId id="357" r:id="rId23"/>
+    <p:sldId id="358" r:id="rId24"/>
   </p:sldIdLst>
   <p:sldSz cx="9144000" cy="6858000" type="screen4x3"/>
   <p:notesSz cx="12192000" cy="6858000"/>
   <p:embeddedFontLst>
     <p:embeddedFont>
       <p:font typeface="Consolas" panose="020B0609020204030204" pitchFamily="49" charset="0"/>
-      <p:regular r:id="rId26"/>
-      <p:bold r:id="rId27"/>
-      <p:italic r:id="rId28"/>
-      <p:boldItalic r:id="rId29"/>
+      <p:regular r:id="rId27"/>
+      <p:bold r:id="rId28"/>
+      <p:italic r:id="rId29"/>
+      <p:boldItalic r:id="rId30"/>
     </p:embeddedFont>
     <p:embeddedFont>
       <p:font typeface="Open Sans" panose="020B0606030504020204" pitchFamily="34" charset="0"/>
-      <p:regular r:id="rId30"/>
-      <p:bold r:id="rId31"/>
-      <p:italic r:id="rId32"/>
-      <p:boldItalic r:id="rId33"/>
+      <p:regular r:id="rId31"/>
+      <p:bold r:id="rId32"/>
+      <p:italic r:id="rId33"/>
+      <p:boldItalic r:id="rId34"/>
     </p:embeddedFont>
     <p:embeddedFont>
       <p:font typeface="Tahoma" panose="020B0604030504040204" pitchFamily="34" charset="0"/>
-      <p:regular r:id="rId34"/>
-      <p:bold r:id="rId35"/>
+      <p:regular r:id="rId35"/>
+      <p:bold r:id="rId36"/>
     </p:embeddedFont>
     <p:embeddedFont>
       <p:font typeface="Trebuchet MS" panose="020B0603020202020204" pitchFamily="34" charset="0"/>
-      <p:regular r:id="rId36"/>
-      <p:bold r:id="rId37"/>
-      <p:italic r:id="rId38"/>
-      <p:boldItalic r:id="rId39"/>
+      <p:regular r:id="rId37"/>
+      <p:bold r:id="rId38"/>
+      <p:italic r:id="rId39"/>
+      <p:boldItalic r:id="rId40"/>
     </p:embeddedFont>
     <p:embeddedFont>
       <p:font typeface="Wingdings 3" panose="05040102010807070707" pitchFamily="18" charset="2"/>
-      <p:regular r:id="rId40"/>
+      <p:regular r:id="rId41"/>
     </p:embeddedFont>
   </p:embeddedFontLst>
   <p:defaultTextStyle>
@@ -171,25 +172,25 @@
             <p14:sldId id="256"/>
           </p14:sldIdLst>
         </p14:section>
-        <p14:section name="CONTENIDO" id="{A7719EAC-2FEC-43A1-A51F-3CEBCD789471}">
+        <p14:section name="." id="{A7719EAC-2FEC-43A1-A51F-3CEBCD789471}">
           <p14:sldIdLst>
             <p14:sldId id="314"/>
           </p14:sldIdLst>
         </p14:section>
-        <p14:section name="PROCESO SOFTWARE" id="{35D09197-F951-4513-BE1B-88ED325C60A1}">
+        <p14:section name="." id="{35D09197-F951-4513-BE1B-88ED325C60A1}">
           <p14:sldIdLst>
             <p14:sldId id="321"/>
             <p14:sldId id="337"/>
           </p14:sldIdLst>
         </p14:section>
-        <p14:section name="3 DOCUMENTACIÓN" id="{FCE142CC-F8D9-4CCE-A8C3-F3EFAA3F862F}">
+        <p14:section name="." id="{FCE142CC-F8D9-4CCE-A8C3-F3EFAA3F862F}">
           <p14:sldIdLst>
             <p14:sldId id="323"/>
             <p14:sldId id="324"/>
             <p14:sldId id="328"/>
           </p14:sldIdLst>
         </p14:section>
-        <p14:section name="RECURSOS" id="{5A9A2E12-7646-41F5-A12A-BD84E5FDFE69}">
+        <p14:section name="." id="{5A9A2E12-7646-41F5-A12A-BD84E5FDFE69}">
           <p14:sldIdLst>
             <p14:sldId id="325"/>
             <p14:sldId id="326"/>
@@ -206,6 +207,7 @@
             <p14:sldId id="355"/>
             <p14:sldId id="302"/>
             <p14:sldId id="357"/>
+            <p14:sldId id="358"/>
           </p14:sldIdLst>
         </p14:section>
       </p14:sectionLst>
@@ -241,13 +243,82 @@
 <file path=ppt/revisionInfo.xml><?xml version="1.0" encoding="utf-8"?>
 <p1510:revInfo xmlns:a="http://schemas.openxmlformats.org/drawingml/2006/main" xmlns:r="http://schemas.openxmlformats.org/officeDocument/2006/relationships" xmlns:p1510="http://schemas.microsoft.com/office/powerpoint/2015/10/main">
   <p1510:revLst>
-    <p1510:client id="{93F31A34-6DDD-A244-0028-3EFF1DA70E0C}" v="27" dt="2025-11-02T06:41:22.681"/>
+    <p1510:client id="{F463E8BD-30D6-EBFF-9B8D-B48BEDD0C988}" v="7" dt="2025-11-28T11:18:47.302"/>
   </p1510:revLst>
 </p1510:revInfo>
 </file>
 
 <file path=ppt/changesInfos/changesInfo1.xml><?xml version="1.0" encoding="utf-8"?>
 <pc:chgInfo xmlns:a="http://schemas.openxmlformats.org/drawingml/2006/main" xmlns:r="http://schemas.openxmlformats.org/officeDocument/2006/relationships" xmlns:ac="http://schemas.microsoft.com/office/drawing/2013/main/command" xmlns:pc="http://schemas.microsoft.com/office/powerpoint/2013/main/command">
+  <pc:docChgLst>
+    <pc:chgData name="MIGUEL TRIGUEROS MUÑOZ" userId="S::miguel.trigueros@aulaxxi.murciaeduca.es::a4ee0321-97d7-430f-98a8-7ed13ff9a4bf" providerId="AD" clId="Web-{31132C14-4F59-9F92-6150-2A4A30A1C9AC}"/>
+    <pc:docChg chg="modSld">
+      <pc:chgData name="MIGUEL TRIGUEROS MUÑOZ" userId="S::miguel.trigueros@aulaxxi.murciaeduca.es::a4ee0321-97d7-430f-98a8-7ed13ff9a4bf" providerId="AD" clId="Web-{31132C14-4F59-9F92-6150-2A4A30A1C9AC}" dt="2025-11-14T11:40:06.734" v="10" actId="20577"/>
+      <pc:docMkLst>
+        <pc:docMk/>
+      </pc:docMkLst>
+      <pc:sldChg chg="modSp">
+        <pc:chgData name="MIGUEL TRIGUEROS MUÑOZ" userId="S::miguel.trigueros@aulaxxi.murciaeduca.es::a4ee0321-97d7-430f-98a8-7ed13ff9a4bf" providerId="AD" clId="Web-{31132C14-4F59-9F92-6150-2A4A30A1C9AC}" dt="2025-11-14T10:58:29.825" v="4" actId="14100"/>
+        <pc:sldMkLst>
+          <pc:docMk/>
+          <pc:sldMk cId="308865771" sldId="256"/>
+        </pc:sldMkLst>
+        <pc:spChg chg="mod">
+          <ac:chgData name="MIGUEL TRIGUEROS MUÑOZ" userId="S::miguel.trigueros@aulaxxi.murciaeduca.es::a4ee0321-97d7-430f-98a8-7ed13ff9a4bf" providerId="AD" clId="Web-{31132C14-4F59-9F92-6150-2A4A30A1C9AC}" dt="2025-11-14T10:58:29.825" v="4" actId="14100"/>
+          <ac:spMkLst>
+            <pc:docMk/>
+            <pc:sldMk cId="308865771" sldId="256"/>
+            <ac:spMk id="2" creationId="{BB6B5ACD-B995-716B-F5F7-1C14289F141D}"/>
+          </ac:spMkLst>
+        </pc:spChg>
+      </pc:sldChg>
+      <pc:sldChg chg="addSp modSp">
+        <pc:chgData name="MIGUEL TRIGUEROS MUÑOZ" userId="S::miguel.trigueros@aulaxxi.murciaeduca.es::a4ee0321-97d7-430f-98a8-7ed13ff9a4bf" providerId="AD" clId="Web-{31132C14-4F59-9F92-6150-2A4A30A1C9AC}" dt="2025-11-14T11:25:59.323" v="8" actId="14100"/>
+        <pc:sldMkLst>
+          <pc:docMk/>
+          <pc:sldMk cId="1122745256" sldId="325"/>
+        </pc:sldMkLst>
+        <pc:cxnChg chg="add mod">
+          <ac:chgData name="MIGUEL TRIGUEROS MUÑOZ" userId="S::miguel.trigueros@aulaxxi.murciaeduca.es::a4ee0321-97d7-430f-98a8-7ed13ff9a4bf" providerId="AD" clId="Web-{31132C14-4F59-9F92-6150-2A4A30A1C9AC}" dt="2025-11-14T11:25:59.323" v="8" actId="14100"/>
+          <ac:cxnSpMkLst>
+            <pc:docMk/>
+            <pc:sldMk cId="1122745256" sldId="325"/>
+            <ac:cxnSpMk id="6" creationId="{6485B0ED-C1E2-F567-5127-70497427504B}"/>
+          </ac:cxnSpMkLst>
+        </pc:cxnChg>
+      </pc:sldChg>
+      <pc:sldChg chg="modSp">
+        <pc:chgData name="MIGUEL TRIGUEROS MUÑOZ" userId="S::miguel.trigueros@aulaxxi.murciaeduca.es::a4ee0321-97d7-430f-98a8-7ed13ff9a4bf" providerId="AD" clId="Web-{31132C14-4F59-9F92-6150-2A4A30A1C9AC}" dt="2025-11-14T11:40:01.046" v="9" actId="20577"/>
+        <pc:sldMkLst>
+          <pc:docMk/>
+          <pc:sldMk cId="3761948457" sldId="341"/>
+        </pc:sldMkLst>
+        <pc:spChg chg="mod">
+          <ac:chgData name="MIGUEL TRIGUEROS MUÑOZ" userId="S::miguel.trigueros@aulaxxi.murciaeduca.es::a4ee0321-97d7-430f-98a8-7ed13ff9a4bf" providerId="AD" clId="Web-{31132C14-4F59-9F92-6150-2A4A30A1C9AC}" dt="2025-11-14T11:40:01.046" v="9" actId="20577"/>
+          <ac:spMkLst>
+            <pc:docMk/>
+            <pc:sldMk cId="3761948457" sldId="341"/>
+            <ac:spMk id="3" creationId="{67C8410E-0545-8959-3559-84841A36BEE1}"/>
+          </ac:spMkLst>
+        </pc:spChg>
+      </pc:sldChg>
+      <pc:sldChg chg="modSp">
+        <pc:chgData name="MIGUEL TRIGUEROS MUÑOZ" userId="S::miguel.trigueros@aulaxxi.murciaeduca.es::a4ee0321-97d7-430f-98a8-7ed13ff9a4bf" providerId="AD" clId="Web-{31132C14-4F59-9F92-6150-2A4A30A1C9AC}" dt="2025-11-14T11:40:06.734" v="10" actId="20577"/>
+        <pc:sldMkLst>
+          <pc:docMk/>
+          <pc:sldMk cId="1759713922" sldId="342"/>
+        </pc:sldMkLst>
+        <pc:spChg chg="mod">
+          <ac:chgData name="MIGUEL TRIGUEROS MUÑOZ" userId="S::miguel.trigueros@aulaxxi.murciaeduca.es::a4ee0321-97d7-430f-98a8-7ed13ff9a4bf" providerId="AD" clId="Web-{31132C14-4F59-9F92-6150-2A4A30A1C9AC}" dt="2025-11-14T11:40:06.734" v="10" actId="20577"/>
+          <ac:spMkLst>
+            <pc:docMk/>
+            <pc:sldMk cId="1759713922" sldId="342"/>
+            <ac:spMk id="3" creationId="{67C8410E-0545-8959-3559-84841A36BEE1}"/>
+          </ac:spMkLst>
+        </pc:spChg>
+      </pc:sldChg>
+    </pc:docChg>
+  </pc:docChgLst>
   <pc:docChgLst>
     <pc:chgData name="MIGUEL TRIGUEROS MUÑOZ" userId="S::miguel.trigueros@aulaxxi.murciaeduca.es::a4ee0321-97d7-430f-98a8-7ed13ff9a4bf" providerId="AD" clId="Web-{93F31A34-6DDD-A244-0028-3EFF1DA70E0C}"/>
     <pc:docChg chg="modSld sldOrd">
@@ -287,6 +358,160 @@
       </pc:sldChg>
     </pc:docChg>
   </pc:docChgLst>
+  <pc:docChgLst>
+    <pc:chgData name="MIGUEL TRIGUEROS MUÑOZ" userId="S::miguel.trigueros@aulaxxi.murciaeduca.es::a4ee0321-97d7-430f-98a8-7ed13ff9a4bf" providerId="AD" clId="Web-{F463E8BD-30D6-EBFF-9B8D-B48BEDD0C988}"/>
+    <pc:docChg chg="addSld modSld modSection">
+      <pc:chgData name="MIGUEL TRIGUEROS MUÑOZ" userId="S::miguel.trigueros@aulaxxi.murciaeduca.es::a4ee0321-97d7-430f-98a8-7ed13ff9a4bf" providerId="AD" clId="Web-{F463E8BD-30D6-EBFF-9B8D-B48BEDD0C988}" dt="2025-11-28T11:18:47.302" v="5" actId="1076"/>
+      <pc:docMkLst>
+        <pc:docMk/>
+      </pc:docMkLst>
+      <pc:sldChg chg="addSp delSp modSp add replId">
+        <pc:chgData name="MIGUEL TRIGUEROS MUÑOZ" userId="S::miguel.trigueros@aulaxxi.murciaeduca.es::a4ee0321-97d7-430f-98a8-7ed13ff9a4bf" providerId="AD" clId="Web-{F463E8BD-30D6-EBFF-9B8D-B48BEDD0C988}" dt="2025-11-28T11:18:47.302" v="5" actId="1076"/>
+        <pc:sldMkLst>
+          <pc:docMk/>
+          <pc:sldMk cId="3103405618" sldId="358"/>
+        </pc:sldMkLst>
+        <pc:spChg chg="add del mod">
+          <ac:chgData name="MIGUEL TRIGUEROS MUÑOZ" userId="S::miguel.trigueros@aulaxxi.murciaeduca.es::a4ee0321-97d7-430f-98a8-7ed13ff9a4bf" providerId="AD" clId="Web-{F463E8BD-30D6-EBFF-9B8D-B48BEDD0C988}" dt="2025-11-28T11:18:45.302" v="4"/>
+          <ac:spMkLst>
+            <pc:docMk/>
+            <pc:sldMk cId="3103405618" sldId="358"/>
+            <ac:spMk id="4" creationId="{381A2FAC-AFC5-941D-DFA8-AE53777F72AF}"/>
+          </ac:spMkLst>
+        </pc:spChg>
+        <pc:spChg chg="del">
+          <ac:chgData name="MIGUEL TRIGUEROS MUÑOZ" userId="S::miguel.trigueros@aulaxxi.murciaeduca.es::a4ee0321-97d7-430f-98a8-7ed13ff9a4bf" providerId="AD" clId="Web-{F463E8BD-30D6-EBFF-9B8D-B48BEDD0C988}" dt="2025-11-28T11:18:37.583" v="1"/>
+          <ac:spMkLst>
+            <pc:docMk/>
+            <pc:sldMk cId="3103405618" sldId="358"/>
+            <ac:spMk id="7" creationId="{A358B58F-E252-F4F2-2D23-654BDE082B94}"/>
+          </ac:spMkLst>
+        </pc:spChg>
+        <pc:picChg chg="add mod">
+          <ac:chgData name="MIGUEL TRIGUEROS MUÑOZ" userId="S::miguel.trigueros@aulaxxi.murciaeduca.es::a4ee0321-97d7-430f-98a8-7ed13ff9a4bf" providerId="AD" clId="Web-{F463E8BD-30D6-EBFF-9B8D-B48BEDD0C988}" dt="2025-11-28T11:18:47.302" v="5" actId="1076"/>
+          <ac:picMkLst>
+            <pc:docMk/>
+            <pc:sldMk cId="3103405618" sldId="358"/>
+            <ac:picMk id="5" creationId="{68E71852-F777-0EA3-CC81-CC97BDB3F360}"/>
+          </ac:picMkLst>
+        </pc:picChg>
+      </pc:sldChg>
+    </pc:docChg>
+  </pc:docChgLst>
+  <pc:docChgLst>
+    <pc:chgData name="MIGUEL TRIGUEROS MUÑOZ" userId="S::miguel.trigueros@aulaxxi.murciaeduca.es::a4ee0321-97d7-430f-98a8-7ed13ff9a4bf" providerId="AD" clId="Web-{C2FB6734-11CB-FB4B-2BCC-5A38CE4D6A80}"/>
+    <pc:docChg chg="addSld delSld modSection">
+      <pc:chgData name="MIGUEL TRIGUEROS MUÑOZ" userId="S::miguel.trigueros@aulaxxi.murciaeduca.es::a4ee0321-97d7-430f-98a8-7ed13ff9a4bf" providerId="AD" clId="Web-{C2FB6734-11CB-FB4B-2BCC-5A38CE4D6A80}" dt="2025-11-02T07:06:54.958" v="33"/>
+      <pc:docMkLst>
+        <pc:docMk/>
+      </pc:docMkLst>
+      <pc:sldChg chg="add del">
+        <pc:chgData name="MIGUEL TRIGUEROS MUÑOZ" userId="S::miguel.trigueros@aulaxxi.murciaeduca.es::a4ee0321-97d7-430f-98a8-7ed13ff9a4bf" providerId="AD" clId="Web-{C2FB6734-11CB-FB4B-2BCC-5A38CE4D6A80}" dt="2025-11-02T07:05:24.829" v="28"/>
+        <pc:sldMkLst>
+          <pc:docMk/>
+          <pc:sldMk cId="1662085430" sldId="302"/>
+        </pc:sldMkLst>
+      </pc:sldChg>
+      <pc:sldChg chg="add del">
+        <pc:chgData name="MIGUEL TRIGUEROS MUÑOZ" userId="S::miguel.trigueros@aulaxxi.murciaeduca.es::a4ee0321-97d7-430f-98a8-7ed13ff9a4bf" providerId="AD" clId="Web-{C2FB6734-11CB-FB4B-2BCC-5A38CE4D6A80}" dt="2025-11-02T07:05:23.969" v="15"/>
+        <pc:sldMkLst>
+          <pc:docMk/>
+          <pc:sldMk cId="1122745256" sldId="325"/>
+        </pc:sldMkLst>
+      </pc:sldChg>
+      <pc:sldChg chg="add del">
+        <pc:chgData name="MIGUEL TRIGUEROS MUÑOZ" userId="S::miguel.trigueros@aulaxxi.murciaeduca.es::a4ee0321-97d7-430f-98a8-7ed13ff9a4bf" providerId="AD" clId="Web-{C2FB6734-11CB-FB4B-2BCC-5A38CE4D6A80}" dt="2025-11-02T07:05:24.032" v="16"/>
+        <pc:sldMkLst>
+          <pc:docMk/>
+          <pc:sldMk cId="3983183523" sldId="326"/>
+        </pc:sldMkLst>
+      </pc:sldChg>
+      <pc:sldChg chg="add del">
+        <pc:chgData name="MIGUEL TRIGUEROS MUÑOZ" userId="S::miguel.trigueros@aulaxxi.murciaeduca.es::a4ee0321-97d7-430f-98a8-7ed13ff9a4bf" providerId="AD" clId="Web-{C2FB6734-11CB-FB4B-2BCC-5A38CE4D6A80}" dt="2025-11-02T07:05:24.188" v="18"/>
+        <pc:sldMkLst>
+          <pc:docMk/>
+          <pc:sldMk cId="2336738011" sldId="333"/>
+        </pc:sldMkLst>
+      </pc:sldChg>
+      <pc:sldChg chg="add del">
+        <pc:chgData name="MIGUEL TRIGUEROS MUÑOZ" userId="S::miguel.trigueros@aulaxxi.murciaeduca.es::a4ee0321-97d7-430f-98a8-7ed13ff9a4bf" providerId="AD" clId="Web-{C2FB6734-11CB-FB4B-2BCC-5A38CE4D6A80}" dt="2025-11-02T07:05:24.266" v="19"/>
+        <pc:sldMkLst>
+          <pc:docMk/>
+          <pc:sldMk cId="3761948457" sldId="341"/>
+        </pc:sldMkLst>
+      </pc:sldChg>
+      <pc:sldChg chg="add del">
+        <pc:chgData name="MIGUEL TRIGUEROS MUÑOZ" userId="S::miguel.trigueros@aulaxxi.murciaeduca.es::a4ee0321-97d7-430f-98a8-7ed13ff9a4bf" providerId="AD" clId="Web-{C2FB6734-11CB-FB4B-2BCC-5A38CE4D6A80}" dt="2025-11-02T07:05:24.344" v="20"/>
+        <pc:sldMkLst>
+          <pc:docMk/>
+          <pc:sldMk cId="1759713922" sldId="342"/>
+        </pc:sldMkLst>
+      </pc:sldChg>
+      <pc:sldChg chg="add del">
+        <pc:chgData name="MIGUEL TRIGUEROS MUÑOZ" userId="S::miguel.trigueros@aulaxxi.murciaeduca.es::a4ee0321-97d7-430f-98a8-7ed13ff9a4bf" providerId="AD" clId="Web-{C2FB6734-11CB-FB4B-2BCC-5A38CE4D6A80}" dt="2025-11-02T07:05:24.407" v="21"/>
+        <pc:sldMkLst>
+          <pc:docMk/>
+          <pc:sldMk cId="1363057816" sldId="343"/>
+        </pc:sldMkLst>
+      </pc:sldChg>
+      <pc:sldChg chg="add del">
+        <pc:chgData name="MIGUEL TRIGUEROS MUÑOZ" userId="S::miguel.trigueros@aulaxxi.murciaeduca.es::a4ee0321-97d7-430f-98a8-7ed13ff9a4bf" providerId="AD" clId="Web-{C2FB6734-11CB-FB4B-2BCC-5A38CE4D6A80}" dt="2025-11-02T07:05:24.454" v="22"/>
+        <pc:sldMkLst>
+          <pc:docMk/>
+          <pc:sldMk cId="1188484412" sldId="350"/>
+        </pc:sldMkLst>
+      </pc:sldChg>
+      <pc:sldChg chg="add del">
+        <pc:chgData name="MIGUEL TRIGUEROS MUÑOZ" userId="S::miguel.trigueros@aulaxxi.murciaeduca.es::a4ee0321-97d7-430f-98a8-7ed13ff9a4bf" providerId="AD" clId="Web-{C2FB6734-11CB-FB4B-2BCC-5A38CE4D6A80}" dt="2025-11-02T07:05:24.516" v="23"/>
+        <pc:sldMkLst>
+          <pc:docMk/>
+          <pc:sldMk cId="2076484974" sldId="351"/>
+        </pc:sldMkLst>
+      </pc:sldChg>
+      <pc:sldChg chg="add del">
+        <pc:chgData name="MIGUEL TRIGUEROS MUÑOZ" userId="S::miguel.trigueros@aulaxxi.murciaeduca.es::a4ee0321-97d7-430f-98a8-7ed13ff9a4bf" providerId="AD" clId="Web-{C2FB6734-11CB-FB4B-2BCC-5A38CE4D6A80}" dt="2025-11-02T07:05:24.563" v="24"/>
+        <pc:sldMkLst>
+          <pc:docMk/>
+          <pc:sldMk cId="683416156" sldId="352"/>
+        </pc:sldMkLst>
+      </pc:sldChg>
+      <pc:sldChg chg="add del">
+        <pc:chgData name="MIGUEL TRIGUEROS MUÑOZ" userId="S::miguel.trigueros@aulaxxi.murciaeduca.es::a4ee0321-97d7-430f-98a8-7ed13ff9a4bf" providerId="AD" clId="Web-{C2FB6734-11CB-FB4B-2BCC-5A38CE4D6A80}" dt="2025-11-02T07:05:24.641" v="25"/>
+        <pc:sldMkLst>
+          <pc:docMk/>
+          <pc:sldMk cId="1131165253" sldId="353"/>
+        </pc:sldMkLst>
+      </pc:sldChg>
+      <pc:sldChg chg="add del">
+        <pc:chgData name="MIGUEL TRIGUEROS MUÑOZ" userId="S::miguel.trigueros@aulaxxi.murciaeduca.es::a4ee0321-97d7-430f-98a8-7ed13ff9a4bf" providerId="AD" clId="Web-{C2FB6734-11CB-FB4B-2BCC-5A38CE4D6A80}" dt="2025-11-02T07:05:24.719" v="26"/>
+        <pc:sldMkLst>
+          <pc:docMk/>
+          <pc:sldMk cId="3098520206" sldId="354"/>
+        </pc:sldMkLst>
+      </pc:sldChg>
+      <pc:sldChg chg="add del">
+        <pc:chgData name="MIGUEL TRIGUEROS MUÑOZ" userId="S::miguel.trigueros@aulaxxi.murciaeduca.es::a4ee0321-97d7-430f-98a8-7ed13ff9a4bf" providerId="AD" clId="Web-{C2FB6734-11CB-FB4B-2BCC-5A38CE4D6A80}" dt="2025-11-02T07:05:24.782" v="27"/>
+        <pc:sldMkLst>
+          <pc:docMk/>
+          <pc:sldMk cId="3753997660" sldId="355"/>
+        </pc:sldMkLst>
+      </pc:sldChg>
+      <pc:sldChg chg="add del">
+        <pc:chgData name="MIGUEL TRIGUEROS MUÑOZ" userId="S::miguel.trigueros@aulaxxi.murciaeduca.es::a4ee0321-97d7-430f-98a8-7ed13ff9a4bf" providerId="AD" clId="Web-{C2FB6734-11CB-FB4B-2BCC-5A38CE4D6A80}" dt="2025-11-02T07:05:24.110" v="17"/>
+        <pc:sldMkLst>
+          <pc:docMk/>
+          <pc:sldMk cId="3298005134" sldId="356"/>
+        </pc:sldMkLst>
+      </pc:sldChg>
+      <pc:sldChg chg="add del">
+        <pc:chgData name="MIGUEL TRIGUEROS MUÑOZ" userId="S::miguel.trigueros@aulaxxi.murciaeduca.es::a4ee0321-97d7-430f-98a8-7ed13ff9a4bf" providerId="AD" clId="Web-{C2FB6734-11CB-FB4B-2BCC-5A38CE4D6A80}" dt="2025-11-02T07:05:24.876" v="29"/>
+        <pc:sldMkLst>
+          <pc:docMk/>
+          <pc:sldMk cId="2292523160" sldId="357"/>
+        </pc:sldMkLst>
+      </pc:sldChg>
+    </pc:docChg>
+  </pc:docChgLst>
 </pc:chgInfo>
 </file>
 
@@ -384,7 +609,7 @@
           <a:p>
             <a:fld id="{BA89FAE3-5837-4C1B-BC4B-90063F16532C}" type="datetimeFigureOut">
               <a:rPr lang="es-ES" smtClean="0"/>
-              <a:t>01/11/2025</a:t>
+              <a:t>28/11/2025</a:t>
             </a:fld>
             <a:endParaRPr lang="es-ES"/>
           </a:p>
@@ -561,7 +786,7 @@
           <a:p>
             <a:fld id="{8EB2F5B8-9C38-4C2F-A3DB-B7BB22627150}" type="datetimeFigureOut">
               <a:rPr lang="es-ES" smtClean="0"/>
-              <a:t>01/11/2025</a:t>
+              <a:t>28/11/2025</a:t>
             </a:fld>
             <a:endParaRPr lang="es-ES"/>
           </a:p>
@@ -903,6 +1128,124 @@
     <p:extLst>
       <p:ext uri="{BB962C8B-B14F-4D97-AF65-F5344CB8AC3E}">
         <p14:creationId xmlns:p14="http://schemas.microsoft.com/office/powerpoint/2010/main" val="2416217424"/>
+      </p:ext>
+    </p:extLst>
+  </p:cSld>
+  <p:clrMapOvr>
+    <a:masterClrMapping/>
+  </p:clrMapOvr>
+</p:notes>
+</file>
+
+<file path=ppt/notesSlides/notesSlide10.xml><?xml version="1.0" encoding="utf-8"?>
+<p:notes xmlns:a="http://schemas.openxmlformats.org/drawingml/2006/main" xmlns:r="http://schemas.openxmlformats.org/officeDocument/2006/relationships" xmlns:p="http://schemas.openxmlformats.org/presentationml/2006/main">
+  <p:cSld>
+    <p:spTree>
+      <p:nvGrpSpPr>
+        <p:cNvPr id="1" name="">
+          <a:extLst>
+            <a:ext uri="{FF2B5EF4-FFF2-40B4-BE49-F238E27FC236}">
+              <a16:creationId xmlns:a16="http://schemas.microsoft.com/office/drawing/2014/main" id="{00794C01-698F-8020-A3BF-313050398C94}"/>
+            </a:ext>
+          </a:extLst>
+        </p:cNvPr>
+        <p:cNvGrpSpPr/>
+        <p:nvPr/>
+      </p:nvGrpSpPr>
+      <p:grpSpPr>
+        <a:xfrm>
+          <a:off x="0" y="0"/>
+          <a:ext cx="0" cy="0"/>
+          <a:chOff x="0" y="0"/>
+          <a:chExt cx="0" cy="0"/>
+        </a:xfrm>
+      </p:grpSpPr>
+      <p:sp>
+        <p:nvSpPr>
+          <p:cNvPr id="2" name="Marcador de imagen de diapositiva 1">
+            <a:extLst>
+              <a:ext uri="{FF2B5EF4-FFF2-40B4-BE49-F238E27FC236}">
+                <a16:creationId xmlns:a16="http://schemas.microsoft.com/office/drawing/2014/main" id="{4CAE35D8-2CE3-938B-39C3-4EB677A7E9DB}"/>
+              </a:ext>
+            </a:extLst>
+          </p:cNvPr>
+          <p:cNvSpPr>
+            <a:spLocks noGrp="1" noRot="1" noChangeAspect="1"/>
+          </p:cNvSpPr>
+          <p:nvPr>
+            <p:ph type="sldImg"/>
+          </p:nvPr>
+        </p:nvSpPr>
+        <p:spPr/>
+      </p:sp>
+      <p:sp>
+        <p:nvSpPr>
+          <p:cNvPr id="3" name="Marcador de notas 2">
+            <a:extLst>
+              <a:ext uri="{FF2B5EF4-FFF2-40B4-BE49-F238E27FC236}">
+                <a16:creationId xmlns:a16="http://schemas.microsoft.com/office/drawing/2014/main" id="{14F73480-9F54-975E-2A74-4529BB22DFA8}"/>
+              </a:ext>
+            </a:extLst>
+          </p:cNvPr>
+          <p:cNvSpPr>
+            <a:spLocks noGrp="1"/>
+          </p:cNvSpPr>
+          <p:nvPr>
+            <p:ph type="body" idx="1"/>
+          </p:nvPr>
+        </p:nvSpPr>
+        <p:spPr/>
+        <p:txBody>
+          <a:bodyPr/>
+          <a:lstStyle/>
+          <a:p>
+            <a:r>
+              <a:rPr lang="en-US" dirty="0">
+                <a:hlinkClick r:id="rId3"/>
+              </a:rPr>
+              <a:t>https://www.microsiervos.com/archivo/gadgets/replica-citizen-watch-multi-alarm-iii-diagrama-de-estados.html</a:t>
+            </a:r>
+            <a:r>
+              <a:rPr lang="en-US" dirty="0"/>
+              <a:t> </a:t>
+            </a:r>
+            <a:endParaRPr lang="es-ES" dirty="0"/>
+          </a:p>
+        </p:txBody>
+      </p:sp>
+      <p:sp>
+        <p:nvSpPr>
+          <p:cNvPr id="4" name="Marcador de número de diapositiva 3">
+            <a:extLst>
+              <a:ext uri="{FF2B5EF4-FFF2-40B4-BE49-F238E27FC236}">
+                <a16:creationId xmlns:a16="http://schemas.microsoft.com/office/drawing/2014/main" id="{3C6F8FA3-F01F-4572-D326-7FB70AF8DD0D}"/>
+              </a:ext>
+            </a:extLst>
+          </p:cNvPr>
+          <p:cNvSpPr>
+            <a:spLocks noGrp="1"/>
+          </p:cNvSpPr>
+          <p:nvPr>
+            <p:ph type="sldNum" sz="quarter" idx="5"/>
+          </p:nvPr>
+        </p:nvSpPr>
+        <p:spPr/>
+        <p:txBody>
+          <a:bodyPr/>
+          <a:lstStyle/>
+          <a:p>
+            <a:fld id="{28601F93-ECE8-401E-83DB-A934B2073DDB}" type="slidenum">
+              <a:rPr lang="es-ES" smtClean="0"/>
+              <a:t>23</a:t>
+            </a:fld>
+            <a:endParaRPr lang="es-ES"/>
+          </a:p>
+        </p:txBody>
+      </p:sp>
+    </p:spTree>
+    <p:extLst>
+      <p:ext uri="{BB962C8B-B14F-4D97-AF65-F5344CB8AC3E}">
+        <p14:creationId xmlns:p14="http://schemas.microsoft.com/office/powerpoint/2010/main" val="1214936528"/>
       </p:ext>
     </p:extLst>
   </p:cSld>
@@ -3801,7 +4144,7 @@
           <a:p>
             <a:fld id="{4573F839-80E0-456A-B4D0-BAFED41946AC}" type="datetime1">
               <a:rPr lang="en-US" smtClean="0"/>
-              <a:t>11/1/2025</a:t>
+              <a:t>11/28/2025</a:t>
             </a:fld>
             <a:endParaRPr lang="en-US"/>
           </a:p>
@@ -3979,7 +4322,7 @@
           <a:p>
             <a:fld id="{51593C50-AD2B-485A-B3A1-D50376802F8F}" type="datetime1">
               <a:rPr lang="en-US" smtClean="0"/>
-              <a:t>11/1/2025</a:t>
+              <a:t>11/28/2025</a:t>
             </a:fld>
             <a:endParaRPr lang="en-US"/>
           </a:p>
@@ -5413,7 +5756,7 @@
         <p:spPr>
           <a:xfrm>
             <a:off x="2025138" y="324394"/>
-            <a:ext cx="3695588" cy="1725597"/>
+            <a:ext cx="4371603" cy="1743386"/>
           </a:xfrm>
         </p:spPr>
         <p:txBody>
@@ -5423,7 +5766,7 @@
             <a:pPr algn="l"/>
             <a:r>
               <a:rPr lang="es-ES" dirty="0"/>
-              <a:t>UT4 OTROS DIAGRAMAS</a:t>
+              <a:t>UT2b OTROS DIAGRAMAS</a:t>
             </a:r>
           </a:p>
         </p:txBody>
@@ -6075,24 +6418,24 @@
         </p:nvSpPr>
         <p:spPr/>
         <p:txBody>
-          <a:bodyPr/>
+          <a:bodyPr vert="horz" lIns="91440" tIns="45720" rIns="91440" bIns="45720" rtlCol="0" anchor="t">
+            <a:normAutofit/>
+          </a:bodyPr>
           <a:lstStyle/>
           <a:p>
             <a:pPr rtl="0" eaLnBrk="1" latinLnBrk="0" hangingPunct="1"/>
             <a:r>
+              <a:rPr lang="es-ES" dirty="0"/>
+              <a:t>Bloque</a:t>
+            </a:r>
+            <a:r>
               <a:rPr lang="es-ES" sz="1800" kern="1200" dirty="0">
-                <a:solidFill>
-                  <a:schemeClr val="tx1">
-                    <a:lumMod val="75000"/>
-                    <a:lumOff val="25000"/>
-                  </a:schemeClr>
-                </a:solidFill>
                 <a:effectLst/>
                 <a:latin typeface="+mn-lt"/>
                 <a:ea typeface="+mn-ea"/>
                 <a:cs typeface="+mn-cs"/>
               </a:rPr>
-              <a:t>Boque Alt:</a:t>
+              <a:t> Alt:</a:t>
             </a:r>
             <a:endParaRPr lang="es-ES" dirty="0">
               <a:effectLst/>
@@ -6293,26 +6636,28 @@
         </p:nvSpPr>
         <p:spPr/>
         <p:txBody>
-          <a:bodyPr/>
+          <a:bodyPr vert="horz" lIns="91440" tIns="45720" rIns="91440" bIns="45720" rtlCol="0" anchor="t">
+            <a:normAutofit/>
+          </a:bodyPr>
           <a:lstStyle/>
           <a:p>
             <a:r>
-              <a:rPr lang="es-ES"/>
-              <a:t>Boque </a:t>
-            </a:r>
-            <a:r>
-              <a:rPr lang="es-ES" err="1"/>
+              <a:rPr lang="es-ES" dirty="0"/>
+              <a:t>Bloque </a:t>
+            </a:r>
+            <a:r>
+              <a:rPr lang="es-ES" dirty="0" err="1"/>
               <a:t>Loop</a:t>
             </a:r>
             <a:r>
-              <a:rPr lang="es-ES"/>
+              <a:rPr lang="es-ES" dirty="0"/>
               <a:t>:</a:t>
             </a:r>
           </a:p>
           <a:p>
             <a:pPr lvl="1"/>
             <a:r>
-              <a:rPr lang="es-ES"/>
+              <a:rPr lang="es-ES" dirty="0"/>
               <a:t>se repite una acción un número de veces</a:t>
             </a:r>
           </a:p>
@@ -7130,6 +7475,13 @@
               </a:rPr>
               <a:t>: Representado por flechas, indica el orden en que se ejecutan las actividades, mostrando la secuencia del proceso desde el inicio hasta el fin.</a:t>
             </a:r>
+            <a:endParaRPr lang="es-ES" b="0" i="0">
+              <a:solidFill>
+                <a:srgbClr val="000000"/>
+              </a:solidFill>
+              <a:effectLst/>
+              <a:latin typeface="-apple-system"/>
+            </a:endParaRPr>
           </a:p>
           <a:p>
             <a:pPr algn="l">
@@ -7156,6 +7508,13 @@
               </a:rPr>
               <a:t>: Estos nodos se representan con rombos y muestran los puntos donde el flujo toma un camino dependiendo de una condición. Por ejemplo, una decisión puede dividir el flujo en "Aprobado" o "Rechazado".</a:t>
             </a:r>
+            <a:endParaRPr lang="es-ES" b="0" i="0">
+              <a:solidFill>
+                <a:srgbClr val="000000"/>
+              </a:solidFill>
+              <a:effectLst/>
+              <a:latin typeface="-apple-system"/>
+            </a:endParaRPr>
           </a:p>
           <a:p>
             <a:pPr algn="l">
@@ -7182,6 +7541,13 @@
               </a:rPr>
               <a:t>: Representado por un círculo negro, marca el inicio del proceso. Es único y muestra el punto de partida del flujo de actividades.</a:t>
             </a:r>
+            <a:endParaRPr lang="es-ES" b="0" i="0">
+              <a:solidFill>
+                <a:srgbClr val="000000"/>
+              </a:solidFill>
+              <a:effectLst/>
+              <a:latin typeface="-apple-system"/>
+            </a:endParaRPr>
           </a:p>
           <a:p>
             <a:pPr algn="l">
@@ -7208,6 +7574,13 @@
               </a:rPr>
               <a:t>: Representado por un círculo negro con un borde, señala el final del proceso. Puede haber varios nodos de fin si hay diferentes resultados posibles.</a:t>
             </a:r>
+            <a:endParaRPr lang="es-ES" b="0" i="0">
+              <a:solidFill>
+                <a:srgbClr val="000000"/>
+              </a:solidFill>
+              <a:effectLst/>
+              <a:latin typeface="-apple-system"/>
+            </a:endParaRPr>
           </a:p>
           <a:p>
             <a:pPr algn="l">
@@ -7274,6 +7647,13 @@
               </a:rPr>
               <a:t>: La bifurcación se muestra con líneas horizontales o verticales que dividen el flujo en varios caminos, permitiendo la ejecución de actividades en paralelo. La unión sincroniza estos caminos en un solo flujo.</a:t>
             </a:r>
+            <a:endParaRPr lang="es-ES" b="0" i="0">
+              <a:solidFill>
+                <a:srgbClr val="000000"/>
+              </a:solidFill>
+              <a:effectLst/>
+              <a:latin typeface="-apple-system"/>
+            </a:endParaRPr>
           </a:p>
           <a:p>
             <a:pPr algn="l">
@@ -7300,6 +7680,13 @@
               </a:rPr>
               <a:t>: Representados como rectángulos, muestran los datos u objetos que se utilizan o modifican en el proceso. Se usan para representar entradas y salidas de datos entre actividades.</a:t>
             </a:r>
+            <a:endParaRPr lang="es-ES" b="0" i="0">
+              <a:solidFill>
+                <a:srgbClr val="000000"/>
+              </a:solidFill>
+              <a:effectLst/>
+              <a:latin typeface="-apple-system"/>
+            </a:endParaRPr>
           </a:p>
         </p:txBody>
       </p:sp>
@@ -7492,6 +7879,13 @@
               </a:rPr>
               <a:t>:</a:t>
             </a:r>
+            <a:endParaRPr lang="es-ES" b="0" i="0">
+              <a:solidFill>
+                <a:srgbClr val="000000"/>
+              </a:solidFill>
+              <a:effectLst/>
+              <a:latin typeface="-apple-system"/>
+            </a:endParaRPr>
           </a:p>
           <a:p>
             <a:pPr algn="l">
@@ -7518,6 +7912,13 @@
               </a:rPr>
               <a:t>: </a:t>
             </a:r>
+            <a:endParaRPr lang="es-ES" b="0" i="0">
+              <a:solidFill>
+                <a:srgbClr val="000000"/>
+              </a:solidFill>
+              <a:effectLst/>
+              <a:latin typeface="-apple-system"/>
+            </a:endParaRPr>
           </a:p>
           <a:p>
             <a:pPr algn="l">
@@ -7544,6 +7945,13 @@
               </a:rPr>
               <a:t>: </a:t>
             </a:r>
+            <a:endParaRPr lang="es-ES" b="0" i="0">
+              <a:solidFill>
+                <a:srgbClr val="000000"/>
+              </a:solidFill>
+              <a:effectLst/>
+              <a:latin typeface="-apple-system"/>
+            </a:endParaRPr>
           </a:p>
           <a:p>
             <a:pPr algn="l">
@@ -7570,6 +7978,13 @@
               </a:rPr>
               <a:t>: </a:t>
             </a:r>
+            <a:endParaRPr lang="es-ES" b="0" i="0">
+              <a:solidFill>
+                <a:srgbClr val="000000"/>
+              </a:solidFill>
+              <a:effectLst/>
+              <a:latin typeface="-apple-system"/>
+            </a:endParaRPr>
           </a:p>
           <a:p>
             <a:pPr algn="l">
@@ -7636,6 +8051,13 @@
               </a:rPr>
               <a:t>: </a:t>
             </a:r>
+            <a:endParaRPr lang="es-ES" b="0" i="0">
+              <a:solidFill>
+                <a:srgbClr val="000000"/>
+              </a:solidFill>
+              <a:effectLst/>
+              <a:latin typeface="-apple-system"/>
+            </a:endParaRPr>
           </a:p>
           <a:p>
             <a:pPr algn="l">
@@ -7662,6 +8084,13 @@
               </a:rPr>
               <a:t>:</a:t>
             </a:r>
+            <a:endParaRPr lang="es-ES" b="0" i="0">
+              <a:solidFill>
+                <a:srgbClr val="000000"/>
+              </a:solidFill>
+              <a:effectLst/>
+              <a:latin typeface="-apple-system"/>
+            </a:endParaRPr>
           </a:p>
         </p:txBody>
       </p:sp>
@@ -8271,18 +8700,21 @@
               <a:rPr lang="es-ES" dirty="0"/>
               <a:t>Enunciado completo en el repositorio</a:t>
             </a:r>
+            <a:endParaRPr lang="es-ES"/>
           </a:p>
           <a:p>
             <a:r>
               <a:rPr lang="es-ES" dirty="0"/>
               <a:t>Crea los planteamientos y enúncialos</a:t>
             </a:r>
+            <a:endParaRPr lang="es-ES"/>
           </a:p>
           <a:p>
             <a:r>
               <a:rPr lang="es-ES" dirty="0"/>
               <a:t>Genera los diagramas correspondientes</a:t>
             </a:r>
+            <a:endParaRPr lang="es-ES"/>
           </a:p>
           <a:p>
             <a:r>
@@ -8293,7 +8725,6 @@
               <a:rPr lang="es-ES" dirty="0" err="1"/>
               <a:t>pdf</a:t>
             </a:r>
-            <a:endParaRPr lang="es-ES" dirty="0"/>
           </a:p>
         </p:txBody>
       </p:sp>
@@ -8740,6 +9171,130 @@
     <p:extLst>
       <p:ext uri="{BB962C8B-B14F-4D97-AF65-F5344CB8AC3E}">
         <p14:creationId xmlns:p14="http://schemas.microsoft.com/office/powerpoint/2010/main" val="2292523160"/>
+      </p:ext>
+    </p:extLst>
+  </p:cSld>
+  <p:clrMapOvr>
+    <a:masterClrMapping/>
+  </p:clrMapOvr>
+</p:sld>
+</file>
+
+<file path=ppt/slides/slide23.xml><?xml version="1.0" encoding="utf-8"?>
+<p:sld xmlns:a="http://schemas.openxmlformats.org/drawingml/2006/main" xmlns:r="http://schemas.openxmlformats.org/officeDocument/2006/relationships" xmlns:p="http://schemas.openxmlformats.org/presentationml/2006/main">
+  <p:cSld>
+    <p:spTree>
+      <p:nvGrpSpPr>
+        <p:cNvPr id="1" name="">
+          <a:extLst>
+            <a:ext uri="{FF2B5EF4-FFF2-40B4-BE49-F238E27FC236}">
+              <a16:creationId xmlns:a16="http://schemas.microsoft.com/office/drawing/2014/main" id="{49B1A6A7-4CE0-E807-421B-3D22039D82C8}"/>
+            </a:ext>
+          </a:extLst>
+        </p:cNvPr>
+        <p:cNvGrpSpPr/>
+        <p:nvPr/>
+      </p:nvGrpSpPr>
+      <p:grpSpPr>
+        <a:xfrm>
+          <a:off x="0" y="0"/>
+          <a:ext cx="0" cy="0"/>
+          <a:chOff x="0" y="0"/>
+          <a:chExt cx="0" cy="0"/>
+        </a:xfrm>
+      </p:grpSpPr>
+      <p:sp>
+        <p:nvSpPr>
+          <p:cNvPr id="2" name="Marcador de número de diapositiva 1">
+            <a:extLst>
+              <a:ext uri="{FF2B5EF4-FFF2-40B4-BE49-F238E27FC236}">
+                <a16:creationId xmlns:a16="http://schemas.microsoft.com/office/drawing/2014/main" id="{CF0117EB-6865-88D7-B0A6-209E8FA853B6}"/>
+              </a:ext>
+            </a:extLst>
+          </p:cNvPr>
+          <p:cNvSpPr>
+            <a:spLocks noGrp="1"/>
+          </p:cNvSpPr>
+          <p:nvPr>
+            <p:ph type="sldNum" sz="quarter" idx="12"/>
+          </p:nvPr>
+        </p:nvSpPr>
+        <p:spPr/>
+        <p:txBody>
+          <a:bodyPr/>
+          <a:lstStyle/>
+          <a:p>
+            <a:fld id="{B6F15528-21DE-4FAA-801E-634DDDAF4B2B}" type="slidenum">
+              <a:rPr lang="es-ES" smtClean="0"/>
+              <a:pPr/>
+              <a:t>23</a:t>
+            </a:fld>
+            <a:endParaRPr lang="es-ES"/>
+          </a:p>
+        </p:txBody>
+      </p:sp>
+      <p:sp>
+        <p:nvSpPr>
+          <p:cNvPr id="6" name="Título 5">
+            <a:extLst>
+              <a:ext uri="{FF2B5EF4-FFF2-40B4-BE49-F238E27FC236}">
+                <a16:creationId xmlns:a16="http://schemas.microsoft.com/office/drawing/2014/main" id="{235C1262-5C86-EB24-C8A0-6F5B18F56167}"/>
+              </a:ext>
+            </a:extLst>
+          </p:cNvPr>
+          <p:cNvSpPr>
+            <a:spLocks noGrp="1"/>
+          </p:cNvSpPr>
+          <p:nvPr>
+            <p:ph type="title"/>
+          </p:nvPr>
+        </p:nvSpPr>
+        <p:spPr/>
+        <p:txBody>
+          <a:bodyPr/>
+          <a:lstStyle/>
+          <a:p>
+            <a:r>
+              <a:rPr lang="es-ES" dirty="0"/>
+              <a:t>9. TAREA ED60403# </a:t>
+            </a:r>
+          </a:p>
+        </p:txBody>
+      </p:sp>
+      <p:pic>
+        <p:nvPicPr>
+          <p:cNvPr id="5" name="Imagen 4" descr="Diagrama&#10;&#10;El contenido generado por IA puede ser incorrecto.">
+            <a:extLst>
+              <a:ext uri="{FF2B5EF4-FFF2-40B4-BE49-F238E27FC236}">
+                <a16:creationId xmlns:a16="http://schemas.microsoft.com/office/drawing/2014/main" id="{68E71852-F777-0EA3-CC81-CC97BDB3F360}"/>
+              </a:ext>
+            </a:extLst>
+          </p:cNvPr>
+          <p:cNvPicPr>
+            <a:picLocks noChangeAspect="1"/>
+          </p:cNvPicPr>
+          <p:nvPr/>
+        </p:nvPicPr>
+        <p:blipFill>
+          <a:blip r:embed="rId3"/>
+          <a:stretch>
+            <a:fillRect/>
+          </a:stretch>
+        </p:blipFill>
+        <p:spPr>
+          <a:xfrm>
+            <a:off x="1490479" y="862093"/>
+            <a:ext cx="4952237" cy="5143500"/>
+          </a:xfrm>
+          <a:prstGeom prst="rect">
+            <a:avLst/>
+          </a:prstGeom>
+        </p:spPr>
+      </p:pic>
+    </p:spTree>
+    <p:extLst>
+      <p:ext uri="{BB962C8B-B14F-4D97-AF65-F5344CB8AC3E}">
+        <p14:creationId xmlns:p14="http://schemas.microsoft.com/office/powerpoint/2010/main" val="3103405618"/>
       </p:ext>
     </p:extLst>
   </p:cSld>
@@ -10631,6 +11186,45 @@
           </a:prstGeom>
         </p:spPr>
       </p:pic>
+      <p:cxnSp>
+        <p:nvCxnSpPr>
+          <p:cNvPr id="6" name="Conector recto de flecha 5">
+            <a:extLst>
+              <a:ext uri="{FF2B5EF4-FFF2-40B4-BE49-F238E27FC236}">
+                <a16:creationId xmlns:a16="http://schemas.microsoft.com/office/drawing/2014/main" id="{6485B0ED-C1E2-F567-5127-70497427504B}"/>
+              </a:ext>
+            </a:extLst>
+          </p:cNvPr>
+          <p:cNvCxnSpPr/>
+          <p:nvPr/>
+        </p:nvCxnSpPr>
+        <p:spPr>
+          <a:xfrm flipH="1" flipV="1">
+            <a:off x="1859152" y="4372804"/>
+            <a:ext cx="2077321" cy="56913"/>
+          </a:xfrm>
+          <a:prstGeom prst="straightConnector1">
+            <a:avLst/>
+          </a:prstGeom>
+          <a:ln>
+            <a:tailEnd type="triangle"/>
+          </a:ln>
+        </p:spPr>
+        <p:style>
+          <a:lnRef idx="1">
+            <a:schemeClr val="accent1"/>
+          </a:lnRef>
+          <a:fillRef idx="0">
+            <a:schemeClr val="accent1"/>
+          </a:fillRef>
+          <a:effectRef idx="0">
+            <a:schemeClr val="accent1"/>
+          </a:effectRef>
+          <a:fontRef idx="minor">
+            <a:schemeClr val="tx1"/>
+          </a:fontRef>
+        </p:style>
+      </p:cxnSp>
     </p:spTree>
     <p:extLst>
       <p:ext uri="{BB962C8B-B14F-4D97-AF65-F5344CB8AC3E}">
